--- a/MECH191_metallurgy/slideDecks/pptx/MECH191_Week13_Lecture.pptx
+++ b/MECH191_metallurgy/slideDecks/pptx/MECH191_Week13_Lecture.pptx
@@ -17801,7 +17801,7 @@
         </p:spPr>
         <p:txBody>
           <a:bodyPr wrap="none" lIns="0" rIns="0" tIns="0" bIns="0">
-            <a:spAutoFit/>
+            <a:noAutofit/>
           </a:bodyPr>
           <a:lstStyle/>
           <a:p>
@@ -17812,7 +17812,7 @@
                 </a:solidFill>
                 <a:latin typeface="Calibri"/>
               </a:rPr>
-              <a:t>Metallography Lab — Module 12</a:t>
+              <a:t>Alloy Research Portfolio — Module 12</a:t>
             </a:r>
           </a:p>
         </p:txBody>
@@ -17835,7 +17835,7 @@
         </p:spPr>
         <p:txBody>
           <a:bodyPr wrap="none" lIns="0" rIns="0" tIns="0" bIns="0">
-            <a:spAutoFit/>
+            <a:noAutofit/>
           </a:bodyPr>
           <a:lstStyle/>
           <a:p>
@@ -17846,7 +17846,7 @@
                 </a:solidFill>
                 <a:latin typeface="Calibri"/>
               </a:rPr>
-              <a:t>EXAMET-5-R-600-HD  ·  50–500×</a:t>
+              <a:t>No Microscope Required</a:t>
             </a:r>
           </a:p>
         </p:txBody>
@@ -17971,7 +17971,7 @@
         </p:spPr>
         <p:txBody>
           <a:bodyPr wrap="none" lIns="0" rIns="0" tIns="0" bIns="0">
-            <a:spAutoFit/>
+            <a:noAutofit/>
           </a:bodyPr>
           <a:lstStyle/>
           <a:p>
@@ -17982,7 +17982,7 @@
                 </a:solidFill>
                 <a:latin typeface="Calibri"/>
               </a:rPr>
-              <a:t>Compare pure copper (N) to precipitation-hardened chromium copper </a:t>
+              <a:t>Research 110 copper vs. 182 chromium copper: composition, conductivity,</a:t>
             </a:r>
           </a:p>
         </p:txBody>
@@ -18005,7 +18005,7 @@
         </p:spPr>
         <p:txBody>
           <a:bodyPr wrap="none" lIns="0" rIns="0" tIns="0" bIns="0">
-            <a:spAutoFit/>
+            <a:noAutofit/>
           </a:bodyPr>
           <a:lstStyle/>
           <a:p>
@@ -18016,7 +18016,7 @@
                 </a:solidFill>
                 <a:latin typeface="Calibri"/>
               </a:rPr>
-              <a:t>(O). This week's lab no longer uses a PM specimen — sintering </a:t>
+              <a:t>and published HV for your Hardness Log. Powder metallurgy is covered</a:t>
             </a:r>
           </a:p>
         </p:txBody>
@@ -18039,7 +18039,7 @@
         </p:spPr>
         <p:txBody>
           <a:bodyPr wrap="none" lIns="0" rIns="0" tIns="0" bIns="0">
-            <a:spAutoFit/>
+            <a:noAutofit/>
           </a:bodyPr>
           <a:lstStyle/>
           <a:p>
@@ -18050,7 +18050,7 @@
                 </a:solidFill>
                 <a:latin typeface="Calibri"/>
               </a:rPr>
-              <a:t>fundamentals remain in today's lecture.</a:t>
+              <a:t>in today's lecture, not in this research module.</a:t>
             </a:r>
           </a:p>
         </p:txBody>
@@ -18107,7 +18107,7 @@
         </p:spPr>
         <p:txBody>
           <a:bodyPr wrap="none" lIns="0" rIns="0" tIns="0" bIns="0">
-            <a:spAutoFit/>
+            <a:noAutofit/>
           </a:bodyPr>
           <a:lstStyle/>
           <a:p>
@@ -18118,7 +18118,7 @@
                 </a:solidFill>
                 <a:latin typeface="Calibri"/>
               </a:rPr>
-              <a:t>1  Observe — complete feature table</a:t>
+              <a:t>1  Research — record data &amp; sources</a:t>
             </a:r>
           </a:p>
         </p:txBody>
@@ -18141,7 +18141,7 @@
         </p:spPr>
         <p:txBody>
           <a:bodyPr wrap="none" lIns="0" rIns="0" tIns="0" bIns="0">
-            <a:spAutoFit/>
+            <a:noAutofit/>
           </a:bodyPr>
           <a:lstStyle/>
           <a:p>
@@ -18152,7 +18152,7 @@
                 </a:solidFill>
                 <a:latin typeface="Calibri"/>
               </a:rPr>
-              <a:t>2  Sketch — label magnification &amp; specimen</a:t>
+              <a:t>2  Answer — short-answer questions</a:t>
             </a:r>
           </a:p>
         </p:txBody>
@@ -18175,7 +18175,7 @@
         </p:spPr>
         <p:txBody>
           <a:bodyPr wrap="none" lIns="0" rIns="0" tIns="0" bIns="0">
-            <a:spAutoFit/>
+            <a:noAutofit/>
           </a:bodyPr>
           <a:lstStyle/>
           <a:p>
@@ -18186,7 +18186,7 @@
                 </a:solidFill>
                 <a:latin typeface="Calibri"/>
               </a:rPr>
-              <a:t>3  Answer — 4 short questions</a:t>
+              <a:t>3  Apply — critical-thinking &amp; equations</a:t>
             </a:r>
           </a:p>
         </p:txBody>
@@ -18209,7 +18209,7 @@
         </p:spPr>
         <p:txBody>
           <a:bodyPr wrap="none" lIns="0" rIns="0" tIns="0" bIns="0">
-            <a:spAutoFit/>
+            <a:noAutofit/>
           </a:bodyPr>
           <a:lstStyle/>
           <a:p>
@@ -18220,7 +18220,7 @@
                 </a:solidFill>
                 <a:latin typeface="Calibri"/>
               </a:rPr>
-              <a:t>Specimens to Check Out</a:t>
+              <a:t>Alloys of Record</a:t>
             </a:r>
           </a:p>
         </p:txBody>
@@ -18243,7 +18243,7 @@
         </p:spPr>
         <p:txBody>
           <a:bodyPr wrap="none" lIns="0" rIns="0" tIns="0" bIns="0">
-            <a:spAutoFit/>
+            <a:noAutofit/>
           </a:bodyPr>
           <a:lstStyle/>
           <a:p>
@@ -18254,7 +18254,7 @@
                 </a:solidFill>
                 <a:latin typeface="Calibri"/>
               </a:rPr>
-              <a:t>· Specimens N, O — pure &amp; chromium copper</a:t>
+              <a:t>· Alloys N, O — 110 copper &amp; 182 chromium copper</a:t>
             </a:r>
           </a:p>
         </p:txBody>
@@ -18277,7 +18277,7 @@
         </p:spPr>
         <p:txBody>
           <a:bodyPr wrap="none" lIns="0" rIns="0" tIns="0" bIns="0">
-            <a:spAutoFit/>
+            <a:noAutofit/>
           </a:bodyPr>
           <a:lstStyle/>
           <a:p>
@@ -18288,7 +18288,7 @@
                 </a:solidFill>
                 <a:latin typeface="Calibri"/>
               </a:rPr>
-              <a:t>How to check out the kit:</a:t>
+              <a:t>How to Complete This Module:</a:t>
             </a:r>
           </a:p>
         </p:txBody>
@@ -18311,7 +18311,7 @@
         </p:spPr>
         <p:txBody>
           <a:bodyPr wrap="none" lIns="0" rIns="0" tIns="0" bIns="0">
-            <a:spAutoFit/>
+            <a:noAutofit/>
           </a:bodyPr>
           <a:lstStyle/>
           <a:p>
@@ -18322,7 +18322,7 @@
                 </a:solidFill>
                 <a:latin typeface="Calibri"/>
               </a:rPr>
-              <a:t>1  See instructor after class today</a:t>
+              <a:t>1  Research the alloy(s) using credible sources</a:t>
             </a:r>
           </a:p>
         </p:txBody>
@@ -18345,7 +18345,7 @@
         </p:spPr>
         <p:txBody>
           <a:bodyPr wrap="none" lIns="0" rIns="0" tIns="0" bIns="0">
-            <a:spAutoFit/>
+            <a:noAutofit/>
           </a:bodyPr>
           <a:lstStyle/>
           <a:p>
@@ -18356,7 +18356,7 @@
                 </a:solidFill>
                 <a:latin typeface="Calibri"/>
               </a:rPr>
-              <a:t>2  Sign out the specimen tray</a:t>
+              <a:t>2  Record data with a source citation</a:t>
             </a:r>
           </a:p>
         </p:txBody>
@@ -18379,7 +18379,7 @@
         </p:spPr>
         <p:txBody>
           <a:bodyPr wrap="none" lIns="0" rIns="0" tIns="0" bIns="0">
-            <a:spAutoFit/>
+            <a:noAutofit/>
           </a:bodyPr>
           <a:lstStyle/>
           <a:p>
@@ -18390,7 +18390,7 @@
                 </a:solidFill>
                 <a:latin typeface="Calibri"/>
               </a:rPr>
-              <a:t>3  Use the EXAMET-5 at your convenience</a:t>
+              <a:t>3  Answer the short-answer questions</a:t>
             </a:r>
           </a:p>
         </p:txBody>
@@ -18413,7 +18413,7 @@
         </p:spPr>
         <p:txBody>
           <a:bodyPr wrap="none" lIns="0" rIns="0" tIns="0" bIns="0">
-            <a:spAutoFit/>
+            <a:noAutofit/>
           </a:bodyPr>
           <a:lstStyle/>
           <a:p>
@@ -18424,7 +18424,7 @@
                 </a:solidFill>
                 <a:latin typeface="Calibri"/>
               </a:rPr>
-              <a:t>4  Return kit before leaving class</a:t>
+              <a:t>4  Answer the critical-thinking questions</a:t>
             </a:r>
           </a:p>
         </p:txBody>
@@ -18447,7 +18447,7 @@
         </p:spPr>
         <p:txBody>
           <a:bodyPr wrap="none" lIns="0" rIns="0" tIns="0" bIns="0">
-            <a:spAutoFit/>
+            <a:noAutofit/>
           </a:bodyPr>
           <a:lstStyle/>
           <a:p>
@@ -18458,7 +18458,7 @@
                 </a:solidFill>
                 <a:latin typeface="Calibri"/>
               </a:rPr>
-              <a:t>5  Submit completed module with your portfolio</a:t>
+              <a:t>5  Keep the module with your portfolio</a:t>
             </a:r>
           </a:p>
         </p:txBody>
